--- a/course_materials/weeks/week_02/week_02_relational_algebra_sql_review.pptx
+++ b/course_materials/weeks/week_02/week_02_relational_algebra_sql_review.pptx
@@ -4775,338 +4775,338 @@
 </file>
 
 <file path=ppt/slides/slide11.xml><?xml version="1.0" encoding="utf-8"?>
-<p:sld xmlns:p="http://schemas.openxmlformats.org/presentationml/2006/main">
-  <p:cSld>
-    <p:bg>
-      <p:bgPr>
-        <a:solidFill xmlns:a="http://schemas.openxmlformats.org/drawingml/2006/main">
-          <a:srgbClr val="F7F3EA"/>
-        </a:solidFill>
-      </p:bgPr>
-    </p:bg>
-    <p:spTree>
-      <p:nvGrpSpPr>
-        <p:cNvPr id="1" name=""/>
-        <p:cNvGrpSpPr/>
-        <p:nvPr/>
-      </p:nvGrpSpPr>
-      <p:grpSpPr>
-        <a:xfrm xmlns:a="http://schemas.openxmlformats.org/drawingml/2006/main"/>
-      </p:grpSpPr>
-      <p:sp>
-        <p:nvSpPr>
-          <p:cNvPr id="7" name="">
-            <a:extLst xmlns:a="http://schemas.openxmlformats.org/drawingml/2006/main">
-              <a:ext uri="{FF2B5EF4-FFF2-40B4-BE49-F238E27FC236}">
-                <a16:creationId xmlns:a16="http://schemas.microsoft.com/office/drawing/2014/main" id="{5B09DA4E-1507-4FCC-BC51-BAF0499CEF1E}"/>
-              </a:ext>
-            </a:extLst>
-          </p:cNvPr>
-          <p:cNvSpPr>
-            <a:spLocks xmlns:a="http://schemas.openxmlformats.org/drawingml/2006/main" noGrp="1"/>
-          </p:cNvSpPr>
-          <p:nvPr/>
-        </p:nvSpPr>
-        <p:spPr>
-          <a:xfrm xmlns:a="http://schemas.openxmlformats.org/drawingml/2006/main">
-            <a:off x="552450" y="400050"/>
-            <a:ext cx="1314450" cy="323850"/>
-          </a:xfrm>
-          <a:prstGeom xmlns:a="http://schemas.openxmlformats.org/drawingml/2006/main" prst="roundRect">
-            <a:avLst>
-              <a:gd name="adj" fmla="val 50000"/>
-            </a:avLst>
-          </a:prstGeom>
-          <a:solidFill xmlns:a="http://schemas.openxmlformats.org/drawingml/2006/main">
-            <a:srgbClr val="14213D"/>
-          </a:solidFill>
-          <a:ln xmlns:a="http://schemas.openxmlformats.org/drawingml/2006/main" w="9525">
-            <a:solidFill>
-              <a:srgbClr val="14213D"/>
-            </a:solidFill>
-            <a:prstDash val="solid"/>
-          </a:ln>
-        </p:spPr>
-        <p:txBody>
-          <a:bodyPr xmlns:a="http://schemas.openxmlformats.org/drawingml/2006/main" lIns="66675" tIns="0" rIns="66675" bIns="0" anchor="ctr">
-            <a:normAutofit fontScale="96689"/>
-          </a:bodyPr>
-          <a:lstStyle xmlns:a="http://schemas.openxmlformats.org/drawingml/2006/main"/>
-          <a:p xmlns:a="http://schemas.openxmlformats.org/drawingml/2006/main">
-            <a:pPr algn="ctr">
-              <a:buNone/>
-              <a:defRPr sz="1050" b="1">
-                <a:solidFill>
-                  <a:srgbClr val="FFFFFF"/>
-                </a:solidFill>
-                <a:latin typeface="Avenir Next"/>
-                <a:ea typeface="Avenir Next"/>
-                <a:cs typeface="Avenir Next"/>
-              </a:defRPr>
-            </a:pPr>
-            <a:r>
-              <a:rPr sz="1050" b="1">
-                <a:solidFill>
-                  <a:srgbClr val="FFFFFF"/>
-                </a:solidFill>
-                <a:latin typeface="Avenir Next"/>
-                <a:ea typeface="Avenir Next"/>
-                <a:cs typeface="Avenir Next"/>
-              </a:rPr>
-              <a:t>WORKED VISUAL</a:t>
-            </a:r>
-          </a:p>
-        </p:txBody>
-      </p:sp>
-      <p:sp>
-        <p:nvSpPr>
-          <p:cNvPr id="2" name="">
-            <a:extLst xmlns:a="http://schemas.openxmlformats.org/drawingml/2006/main">
-              <a:ext uri="{FF2B5EF4-FFF2-40B4-BE49-F238E27FC236}">
-                <a16:creationId xmlns:a16="http://schemas.microsoft.com/office/drawing/2014/main" id="{550EFE49-8B00-4C1F-8931-0B2CFD2F359C}"/>
-              </a:ext>
-            </a:extLst>
-          </p:cNvPr>
-          <p:cNvSpPr>
-            <a:spLocks xmlns:a="http://schemas.openxmlformats.org/drawingml/2006/main" noGrp="1"/>
-          </p:cNvSpPr>
-          <p:nvPr/>
-        </p:nvSpPr>
-        <p:spPr>
-          <a:xfrm xmlns:a="http://schemas.openxmlformats.org/drawingml/2006/main">
-            <a:off x="552450" y="914400"/>
-            <a:ext cx="11049000" cy="704850"/>
-          </a:xfrm>
-          <a:prstGeom xmlns:a="http://schemas.openxmlformats.org/drawingml/2006/main" prst="rect">
-            <a:avLst/>
-          </a:prstGeom>
-          <a:noFill xmlns:a="http://schemas.openxmlformats.org/drawingml/2006/main"/>
-          <a:ln xmlns:a="http://schemas.openxmlformats.org/drawingml/2006/main" w="0">
-            <a:noFill/>
-            <a:prstDash val="solid"/>
-          </a:ln>
-        </p:spPr>
-        <p:txBody>
-          <a:bodyPr xmlns:a="http://schemas.openxmlformats.org/drawingml/2006/main" wrap="square" lIns="0" tIns="0" rIns="0" bIns="0" anchor="t">
-            <a:noAutofit/>
-          </a:bodyPr>
-          <a:lstStyle xmlns:a="http://schemas.openxmlformats.org/drawingml/2006/main"/>
-          <a:p xmlns:a="http://schemas.openxmlformats.org/drawingml/2006/main">
-            <a:pPr algn="l">
-              <a:lnSpc>
-                <a:spcPct val="95000"/>
-              </a:lnSpc>
-              <a:buNone/>
-              <a:defRPr sz="3075" b="1">
-                <a:solidFill>
-                  <a:srgbClr val="14213D"/>
-                </a:solidFill>
-                <a:latin typeface="Georgia"/>
-                <a:ea typeface="Georgia"/>
-                <a:cs typeface="Georgia"/>
-              </a:defRPr>
-            </a:pPr>
-            <a:r>
-              <a:rPr sz="3075" b="1">
-                <a:solidFill>
-                  <a:srgbClr val="14213D"/>
-                </a:solidFill>
-                <a:latin typeface="Georgia"/>
-                <a:ea typeface="Georgia"/>
-                <a:cs typeface="Georgia"/>
-              </a:rPr>
-              <a:t>An assignee join selects matching pairs</a:t>
-            </a:r>
-          </a:p>
-        </p:txBody>
-      </p:sp>
-      <p:sp>
-        <p:nvSpPr>
-          <p:cNvPr id="3" name="">
-            <a:extLst xmlns:a="http://schemas.openxmlformats.org/drawingml/2006/main">
-              <a:ext uri="{FF2B5EF4-FFF2-40B4-BE49-F238E27FC236}">
-                <a16:creationId xmlns:a16="http://schemas.microsoft.com/office/drawing/2014/main" id="{B57605E0-C7A0-42C3-8CDA-E2A38132DF11}"/>
-              </a:ext>
-            </a:extLst>
-          </p:cNvPr>
-          <p:cNvSpPr>
-            <a:spLocks xmlns:a="http://schemas.openxmlformats.org/drawingml/2006/main" noGrp="1"/>
-          </p:cNvSpPr>
-          <p:nvPr/>
-        </p:nvSpPr>
-        <p:spPr>
-          <a:xfrm xmlns:a="http://schemas.openxmlformats.org/drawingml/2006/main">
-            <a:off x="10477500" y="6334125"/>
-            <a:ext cx="1143000" cy="228600"/>
-          </a:xfrm>
-          <a:prstGeom xmlns:a="http://schemas.openxmlformats.org/drawingml/2006/main" prst="rect">
-            <a:avLst/>
-          </a:prstGeom>
-          <a:noFill xmlns:a="http://schemas.openxmlformats.org/drawingml/2006/main"/>
-          <a:ln xmlns:a="http://schemas.openxmlformats.org/drawingml/2006/main" w="0">
-            <a:noFill/>
-            <a:prstDash val="solid"/>
-          </a:ln>
-        </p:spPr>
-        <p:txBody>
-          <a:bodyPr xmlns:a="http://schemas.openxmlformats.org/drawingml/2006/main" lIns="0" tIns="0" rIns="0" bIns="0" anchor="t">
-            <a:noAutofit/>
-          </a:bodyPr>
-          <a:lstStyle xmlns:a="http://schemas.openxmlformats.org/drawingml/2006/main"/>
-          <a:p xmlns:a="http://schemas.openxmlformats.org/drawingml/2006/main">
-            <a:pPr algn="r">
-              <a:buNone/>
-              <a:defRPr sz="900" b="1">
-                <a:solidFill>
-                  <a:srgbClr val="64748B"/>
-                </a:solidFill>
-                <a:latin typeface="Menlo"/>
-                <a:ea typeface="Menlo"/>
-                <a:cs typeface="Menlo"/>
-              </a:defRPr>
-            </a:pPr>
-            <a:r>
-              <a:rPr sz="900" b="1">
-                <a:solidFill>
-                  <a:srgbClr val="64748B"/>
-                </a:solidFill>
-                <a:latin typeface="Menlo"/>
-                <a:ea typeface="Menlo"/>
-                <a:cs typeface="Menlo"/>
-              </a:rPr>
-              <a:t>11</a:t>
-            </a:r>
-          </a:p>
-        </p:txBody>
-      </p:sp>
-      <p:pic>
-        <p:nvPicPr>
-          <p:cNvPr id="12" name=""/>
-          <p:cNvPicPr>
-            <a:picLocks xmlns:a="http://schemas.openxmlformats.org/drawingml/2006/main" noChangeAspect="1"/>
-          </p:cNvPicPr>
-          <p:nvPr/>
-        </p:nvPicPr>
-        <p:blipFill>
-          <a:blip xmlns:r="http://schemas.openxmlformats.org/officeDocument/2006/relationships" xmlns:a="http://schemas.openxmlformats.org/drawingml/2006/main" r:embed="Rc24729b187c64034"/>
-          <a:stretch xmlns:a="http://schemas.openxmlformats.org/drawingml/2006/main"/>
-        </p:blipFill>
-        <p:spPr>
-          <a:xfrm xmlns:a="http://schemas.openxmlformats.org/drawingml/2006/main">
-            <a:off x="666750" y="2256277"/>
-            <a:ext cx="10858500" cy="2393072"/>
-          </a:xfrm>
-          <a:prstGeom xmlns:a="http://schemas.openxmlformats.org/drawingml/2006/main" prst="rect">
-            <a:avLst/>
-          </a:prstGeom>
-        </p:spPr>
-      </p:pic>
-      <p:sp>
-        <p:nvSpPr>
-          <p:cNvPr id="5" name="">
-            <a:extLst xmlns:a="http://schemas.openxmlformats.org/drawingml/2006/main">
-              <a:ext uri="{FF2B5EF4-FFF2-40B4-BE49-F238E27FC236}">
-                <a16:creationId xmlns:a16="http://schemas.microsoft.com/office/drawing/2014/main" id="{BA48906F-7F73-44E8-9F58-41A87659E37A}"/>
-              </a:ext>
-            </a:extLst>
-          </p:cNvPr>
-          <p:cNvSpPr>
-            <a:spLocks xmlns:a="http://schemas.openxmlformats.org/drawingml/2006/main" noGrp="1"/>
-          </p:cNvSpPr>
-          <p:nvPr/>
-        </p:nvSpPr>
-        <p:spPr>
-          <a:xfrm xmlns:a="http://schemas.openxmlformats.org/drawingml/2006/main">
-            <a:off x="1619250" y="5286375"/>
-            <a:ext cx="8953500" cy="781050"/>
-          </a:xfrm>
-          <a:prstGeom xmlns:a="http://schemas.openxmlformats.org/drawingml/2006/main" prst="roundRect">
-            <a:avLst>
-              <a:gd name="adj" fmla="val 19512"/>
-            </a:avLst>
-          </a:prstGeom>
-          <a:solidFill xmlns:a="http://schemas.openxmlformats.org/drawingml/2006/main">
-            <a:srgbClr val="172033"/>
-          </a:solidFill>
-          <a:ln xmlns:a="http://schemas.openxmlformats.org/drawingml/2006/main" w="0">
-            <a:solidFill>
-              <a:srgbClr val="172033"/>
-            </a:solidFill>
-            <a:prstDash val="solid"/>
-          </a:ln>
-        </p:spPr>
-        <p:txBody>
-          <a:bodyPr xmlns:a="http://schemas.openxmlformats.org/drawingml/2006/main" wrap="square" lIns="190500" tIns="95250" rIns="190500" bIns="95250" anchor="ctr">
-            <a:noAutofit/>
-          </a:bodyPr>
-          <a:lstStyle xmlns:a="http://schemas.openxmlformats.org/drawingml/2006/main"/>
-          <a:p xmlns:a="http://schemas.openxmlformats.org/drawingml/2006/main">
-            <a:pPr algn="ctr">
-              <a:buNone/>
-              <a:defRPr sz="1575" b="1">
-                <a:solidFill>
-                  <a:srgbClr val="FFFFFF"/>
-                </a:solidFill>
-                <a:latin typeface="Menlo"/>
-                <a:ea typeface="Menlo"/>
-                <a:cs typeface="Menlo"/>
-              </a:defRPr>
-            </a:pPr>
-            <a:r>
-              <a:rPr sz="1575" b="1">
-                <a:solidFill>
-                  <a:srgbClr val="FFFFFF"/>
-                </a:solidFill>
-                <a:latin typeface="Menlo"/>
-                <a:ea typeface="Menlo"/>
-                <a:cs typeface="Menlo"/>
-              </a:rPr>
-              <a:t>tickets.assignee_id = users.user_id</a:t>
-            </a:r>
-          </a:p>
-        </p:txBody>
-      </p:sp>
-      <p:sp>
-        <p:nvSpPr>
-          <p:cNvPr id="6" name="">
-            <a:extLst xmlns:a="http://schemas.openxmlformats.org/drawingml/2006/main">
-              <a:ext uri="{FF2B5EF4-FFF2-40B4-BE49-F238E27FC236}">
-                <a16:creationId xmlns:a16="http://schemas.microsoft.com/office/drawing/2014/main" id="{C761406C-18AD-4554-826C-C38283BFDEF9}"/>
-              </a:ext>
-            </a:extLst>
-          </p:cNvPr>
-          <p:cNvSpPr>
-            <a:spLocks xmlns:a="http://schemas.openxmlformats.org/drawingml/2006/main" noGrp="1"/>
-          </p:cNvSpPr>
-          <p:nvPr/>
-        </p:nvSpPr>
-        <p:spPr>
-          <a:xfrm xmlns:a="http://schemas.openxmlformats.org/drawingml/2006/main">
-            <a:off x="1619250" y="5286375"/>
-            <a:ext cx="76200" cy="781050"/>
-          </a:xfrm>
-          <a:prstGeom xmlns:a="http://schemas.openxmlformats.org/drawingml/2006/main" prst="rect">
-            <a:avLst/>
-          </a:prstGeom>
-          <a:solidFill xmlns:a="http://schemas.openxmlformats.org/drawingml/2006/main">
-            <a:srgbClr val="F4A261"/>
-          </a:solidFill>
-          <a:ln xmlns:a="http://schemas.openxmlformats.org/drawingml/2006/main" w="0">
-            <a:solidFill>
-              <a:srgbClr val="F4A261"/>
-            </a:solidFill>
-            <a:prstDash val="solid"/>
-          </a:ln>
-        </p:spPr>
-      </p:sp>
-    </p:spTree>
-    <p:extLst>
-      <p:ext uri="{BB962C8B-B14F-4D97-AF65-F5344CB8AC3E}">
-        <p14:creationId xmlns:p14="http://schemas.microsoft.com/office/powerpoint/2010/main" val="297771293"/>
-      </p:ext>
-    </p:extLst>
-  </p:cSld>
-</p:sld>
+<ns0:sld xmlns:ns0="http://schemas.openxmlformats.org/presentationml/2006/main" xmlns:ns1="http://schemas.openxmlformats.org/drawingml/2006/main" xmlns:ns2="http://schemas.microsoft.com/office/drawing/2014/main" xmlns:ns3="http://schemas.openxmlformats.org/officeDocument/2006/relationships" xmlns:ns4="http://schemas.microsoft.com/office/powerpoint/2010/main">
+  <ns0:cSld>
+    <ns0:bg>
+      <ns0:bgPr>
+        <ns1:solidFill>
+          <ns1:srgbClr val="F7F3EA"/>
+        </ns1:solidFill>
+      </ns0:bgPr>
+    </ns0:bg>
+    <ns0:spTree>
+      <ns0:nvGrpSpPr>
+        <ns0:cNvPr id="1" name=""/>
+        <ns0:cNvGrpSpPr/>
+        <ns0:nvPr/>
+      </ns0:nvGrpSpPr>
+      <ns0:grpSpPr>
+        <ns1:xfrm/>
+      </ns0:grpSpPr>
+      <ns0:sp>
+        <ns0:nvSpPr>
+          <ns0:cNvPr id="7" name="">
+            <ns1:extLst>
+              <ns1:ext uri="{FF2B5EF4-FFF2-40B4-BE49-F238E27FC236}">
+                <ns2:creationId id="{5B09DA4E-1507-4FCC-BC51-BAF0499CEF1E}"/>
+              </ns1:ext>
+            </ns1:extLst>
+          </ns0:cNvPr>
+          <ns0:cNvSpPr>
+            <ns1:spLocks noGrp="1"/>
+          </ns0:cNvSpPr>
+          <ns0:nvPr/>
+        </ns0:nvSpPr>
+        <ns0:spPr>
+          <ns1:xfrm>
+            <ns1:off x="552450" y="400050"/>
+            <ns1:ext cx="1314450" cy="323850"/>
+          </ns1:xfrm>
+          <ns1:prstGeom prst="roundRect">
+            <ns1:avLst>
+              <ns1:gd name="adj" fmla="val 50000"/>
+            </ns1:avLst>
+          </ns1:prstGeom>
+          <ns1:solidFill>
+            <ns1:srgbClr val="14213D"/>
+          </ns1:solidFill>
+          <ns1:ln w="9525">
+            <ns1:solidFill>
+              <ns1:srgbClr val="14213D"/>
+            </ns1:solidFill>
+            <ns1:prstDash val="solid"/>
+          </ns1:ln>
+        </ns0:spPr>
+        <ns0:txBody>
+          <ns1:bodyPr lIns="66675" tIns="0" rIns="66675" bIns="0" anchor="ctr">
+            <ns1:normAutofit fontScale="96689"/>
+          </ns1:bodyPr>
+          <ns1:lstStyle/>
+          <ns1:p>
+            <ns1:pPr algn="ctr">
+              <ns1:buNone/>
+              <ns1:defRPr sz="1050" b="1">
+                <ns1:solidFill>
+                  <ns1:srgbClr val="FFFFFF"/>
+                </ns1:solidFill>
+                <ns1:latin typeface="Avenir Next"/>
+                <ns1:ea typeface="Avenir Next"/>
+                <ns1:cs typeface="Avenir Next"/>
+              </ns1:defRPr>
+            </ns1:pPr>
+            <ns1:r>
+              <ns1:rPr sz="1050" b="1">
+                <ns1:solidFill>
+                  <ns1:srgbClr val="FFFFFF"/>
+                </ns1:solidFill>
+                <ns1:latin typeface="Avenir Next"/>
+                <ns1:ea typeface="Avenir Next"/>
+                <ns1:cs typeface="Avenir Next"/>
+              </ns1:rPr>
+              <ns1:t>WORKED VISUAL</ns1:t>
+            </ns1:r>
+          </ns1:p>
+        </ns0:txBody>
+      </ns0:sp>
+      <ns0:sp>
+        <ns0:nvSpPr>
+          <ns0:cNvPr id="2" name="">
+            <ns1:extLst>
+              <ns1:ext uri="{FF2B5EF4-FFF2-40B4-BE49-F238E27FC236}">
+                <ns2:creationId id="{550EFE49-8B00-4C1F-8931-0B2CFD2F359C}"/>
+              </ns1:ext>
+            </ns1:extLst>
+          </ns0:cNvPr>
+          <ns0:cNvSpPr>
+            <ns1:spLocks noGrp="1"/>
+          </ns0:cNvSpPr>
+          <ns0:nvPr/>
+        </ns0:nvSpPr>
+        <ns0:spPr>
+          <ns1:xfrm>
+            <ns1:off x="552450" y="914400"/>
+            <ns1:ext cx="11049000" cy="704850"/>
+          </ns1:xfrm>
+          <ns1:prstGeom prst="rect">
+            <ns1:avLst/>
+          </ns1:prstGeom>
+          <ns1:noFill/>
+          <ns1:ln w="0">
+            <ns1:noFill/>
+            <ns1:prstDash val="solid"/>
+          </ns1:ln>
+        </ns0:spPr>
+        <ns0:txBody>
+          <ns1:bodyPr wrap="square" lIns="0" tIns="0" rIns="0" bIns="0" anchor="t">
+            <ns1:noAutofit/>
+          </ns1:bodyPr>
+          <ns1:lstStyle/>
+          <ns1:p>
+            <ns1:pPr algn="l">
+              <ns1:lnSpc>
+                <ns1:spcPct val="95000"/>
+              </ns1:lnSpc>
+              <ns1:buNone/>
+              <ns1:defRPr sz="3075" b="1">
+                <ns1:solidFill>
+                  <ns1:srgbClr val="14213D"/>
+                </ns1:solidFill>
+                <ns1:latin typeface="Georgia"/>
+                <ns1:ea typeface="Georgia"/>
+                <ns1:cs typeface="Georgia"/>
+              </ns1:defRPr>
+            </ns1:pPr>
+            <ns1:r>
+              <ns1:rPr sz="3075" b="1">
+                <ns1:solidFill>
+                  <ns1:srgbClr val="14213D"/>
+                </ns1:solidFill>
+                <ns1:latin typeface="Georgia"/>
+                <ns1:ea typeface="Georgia"/>
+                <ns1:cs typeface="Georgia"/>
+              </ns1:rPr>
+              <ns1:t>An assignee join selects matching pairs</ns1:t>
+            </ns1:r>
+          </ns1:p>
+        </ns0:txBody>
+      </ns0:sp>
+      <ns0:sp>
+        <ns0:nvSpPr>
+          <ns0:cNvPr id="3" name="">
+            <ns1:extLst>
+              <ns1:ext uri="{FF2B5EF4-FFF2-40B4-BE49-F238E27FC236}">
+                <ns2:creationId id="{B57605E0-C7A0-42C3-8CDA-E2A38132DF11}"/>
+              </ns1:ext>
+            </ns1:extLst>
+          </ns0:cNvPr>
+          <ns0:cNvSpPr>
+            <ns1:spLocks noGrp="1"/>
+          </ns0:cNvSpPr>
+          <ns0:nvPr/>
+        </ns0:nvSpPr>
+        <ns0:spPr>
+          <ns1:xfrm>
+            <ns1:off x="10477500" y="6334125"/>
+            <ns1:ext cx="1143000" cy="228600"/>
+          </ns1:xfrm>
+          <ns1:prstGeom prst="rect">
+            <ns1:avLst/>
+          </ns1:prstGeom>
+          <ns1:noFill/>
+          <ns1:ln w="0">
+            <ns1:noFill/>
+            <ns1:prstDash val="solid"/>
+          </ns1:ln>
+        </ns0:spPr>
+        <ns0:txBody>
+          <ns1:bodyPr lIns="0" tIns="0" rIns="0" bIns="0" anchor="t">
+            <ns1:noAutofit/>
+          </ns1:bodyPr>
+          <ns1:lstStyle/>
+          <ns1:p>
+            <ns1:pPr algn="r">
+              <ns1:buNone/>
+              <ns1:defRPr sz="900" b="1">
+                <ns1:solidFill>
+                  <ns1:srgbClr val="64748B"/>
+                </ns1:solidFill>
+                <ns1:latin typeface="Menlo"/>
+                <ns1:ea typeface="Menlo"/>
+                <ns1:cs typeface="Menlo"/>
+              </ns1:defRPr>
+            </ns1:pPr>
+            <ns1:r>
+              <ns1:rPr sz="900" b="1">
+                <ns1:solidFill>
+                  <ns1:srgbClr val="64748B"/>
+                </ns1:solidFill>
+                <ns1:latin typeface="Menlo"/>
+                <ns1:ea typeface="Menlo"/>
+                <ns1:cs typeface="Menlo"/>
+              </ns1:rPr>
+              <ns1:t>11</ns1:t>
+            </ns1:r>
+          </ns1:p>
+        </ns0:txBody>
+      </ns0:sp>
+      <ns0:pic>
+        <ns0:nvPicPr>
+          <ns0:cNvPr id="12" name="" descr="Relational-algebra diagram: 12 ticket tuples and 8 user tuples form 96 candidate pairs in the Cartesian product. Filtering with T.assignee_id = U.user_id keeps only matching pairs, the theta-join result. This is a conceptual derivation, not a requirement that the database physically materialize all 96 pairs."/>
+          <ns0:cNvPicPr>
+            <ns1:picLocks noChangeAspect="1"/>
+          </ns0:cNvPicPr>
+          <ns0:nvPr/>
+        </ns0:nvPicPr>
+        <ns0:blipFill>
+          <ns1:blip ns3:embed="Rc24729b187c64034"/>
+          <ns1:stretch/>
+        </ns0:blipFill>
+        <ns0:spPr>
+          <ns1:xfrm>
+            <ns1:off x="666750" y="2256277"/>
+            <ns1:ext cx="10858500" cy="2393072"/>
+          </ns1:xfrm>
+          <ns1:prstGeom prst="rect">
+            <ns1:avLst/>
+          </ns1:prstGeom>
+        </ns0:spPr>
+      </ns0:pic>
+      <ns0:sp>
+        <ns0:nvSpPr>
+          <ns0:cNvPr id="5" name="">
+            <ns1:extLst>
+              <ns1:ext uri="{FF2B5EF4-FFF2-40B4-BE49-F238E27FC236}">
+                <ns2:creationId id="{BA48906F-7F73-44E8-9F58-41A87659E37A}"/>
+              </ns1:ext>
+            </ns1:extLst>
+          </ns0:cNvPr>
+          <ns0:cNvSpPr>
+            <ns1:spLocks noGrp="1"/>
+          </ns0:cNvSpPr>
+          <ns0:nvPr/>
+        </ns0:nvSpPr>
+        <ns0:spPr>
+          <ns1:xfrm>
+            <ns1:off x="1619250" y="5286375"/>
+            <ns1:ext cx="8953500" cy="781050"/>
+          </ns1:xfrm>
+          <ns1:prstGeom prst="roundRect">
+            <ns1:avLst>
+              <ns1:gd name="adj" fmla="val 19512"/>
+            </ns1:avLst>
+          </ns1:prstGeom>
+          <ns1:solidFill>
+            <ns1:srgbClr val="172033"/>
+          </ns1:solidFill>
+          <ns1:ln w="0">
+            <ns1:solidFill>
+              <ns1:srgbClr val="172033"/>
+            </ns1:solidFill>
+            <ns1:prstDash val="solid"/>
+          </ns1:ln>
+        </ns0:spPr>
+        <ns0:txBody>
+          <ns1:bodyPr wrap="square" lIns="190500" tIns="95250" rIns="190500" bIns="95250" anchor="ctr">
+            <ns1:noAutofit/>
+          </ns1:bodyPr>
+          <ns1:lstStyle/>
+          <ns1:p>
+            <ns1:pPr algn="ctr">
+              <ns1:buNone/>
+              <ns1:defRPr sz="1575" b="1">
+                <ns1:solidFill>
+                  <ns1:srgbClr val="FFFFFF"/>
+                </ns1:solidFill>
+                <ns1:latin typeface="Menlo"/>
+                <ns1:ea typeface="Menlo"/>
+                <ns1:cs typeface="Menlo"/>
+              </ns1:defRPr>
+            </ns1:pPr>
+            <ns1:r>
+              <ns1:rPr sz="1575" b="1">
+                <ns1:solidFill>
+                  <ns1:srgbClr val="FFFFFF"/>
+                </ns1:solidFill>
+                <ns1:latin typeface="Menlo"/>
+                <ns1:ea typeface="Menlo"/>
+                <ns1:cs typeface="Menlo"/>
+              </ns1:rPr>
+              <ns1:t>tickets.assignee_id = users.user_id</ns1:t>
+            </ns1:r>
+          </ns1:p>
+        </ns0:txBody>
+      </ns0:sp>
+      <ns0:sp>
+        <ns0:nvSpPr>
+          <ns0:cNvPr id="6" name="">
+            <ns1:extLst>
+              <ns1:ext uri="{FF2B5EF4-FFF2-40B4-BE49-F238E27FC236}">
+                <ns2:creationId id="{C761406C-18AD-4554-826C-C38283BFDEF9}"/>
+              </ns1:ext>
+            </ns1:extLst>
+          </ns0:cNvPr>
+          <ns0:cNvSpPr>
+            <ns1:spLocks noGrp="1"/>
+          </ns0:cNvSpPr>
+          <ns0:nvPr/>
+        </ns0:nvSpPr>
+        <ns0:spPr>
+          <ns1:xfrm>
+            <ns1:off x="1619250" y="5286375"/>
+            <ns1:ext cx="76200" cy="781050"/>
+          </ns1:xfrm>
+          <ns1:prstGeom prst="rect">
+            <ns1:avLst/>
+          </ns1:prstGeom>
+          <ns1:solidFill>
+            <ns1:srgbClr val="F4A261"/>
+          </ns1:solidFill>
+          <ns1:ln w="0">
+            <ns1:solidFill>
+              <ns1:srgbClr val="F4A261"/>
+            </ns1:solidFill>
+            <ns1:prstDash val="solid"/>
+          </ns1:ln>
+        </ns0:spPr>
+      </ns0:sp>
+    </ns0:spTree>
+    <ns0:extLst>
+      <ns0:ext uri="{BB962C8B-B14F-4D97-AF65-F5344CB8AC3E}">
+        <ns4:creationId val="297771293"/>
+      </ns0:ext>
+    </ns0:extLst>
+  </ns0:cSld>
+</ns0:sld>
 </file>
 
 <file path=ppt/slides/slide12.xml><?xml version="1.0" encoding="utf-8"?>
